--- a/ppt/IoTAI11-Micropython.pptx
+++ b/ppt/IoTAI11-Micropython.pptx
@@ -4602,15 +4602,77 @@
             <a:pPr lvl="1"/>
             <a:r>
               <a:rPr lang="fr-FR" dirty="0" err="1"/>
+              <a:t>mpremote</a:t>
+            </a:r>
+            <a:r>
+              <a:rPr lang="fr-FR" dirty="0"/>
+              <a:t> </a:t>
+            </a:r>
+            <a:r>
+              <a:rPr lang="fr-FR" dirty="0" err="1"/>
+              <a:t>connect</a:t>
+            </a:r>
+            <a:r>
+              <a:rPr lang="fr-FR" dirty="0"/>
+              <a:t> COM3 (il faut fermer </a:t>
+            </a:r>
+            <a:r>
+              <a:rPr lang="fr-FR" dirty="0" err="1"/>
+              <a:t>Thonny</a:t>
+            </a:r>
+            <a:r>
+              <a:rPr lang="fr-FR" dirty="0"/>
+              <a:t>)</a:t>
+            </a:r>
+          </a:p>
+          <a:p>
+            <a:pPr lvl="1"/>
+            <a:r>
+              <a:rPr lang="fr-FR" dirty="0" err="1"/>
+              <a:t>mpremote</a:t>
+            </a:r>
+            <a:r>
+              <a:rPr lang="fr-FR" dirty="0"/>
+              <a:t> </a:t>
+            </a:r>
+            <a:r>
+              <a:rPr lang="fr-FR" dirty="0" err="1"/>
+              <a:t>fs</a:t>
+            </a:r>
+            <a:r>
+              <a:rPr lang="fr-FR" dirty="0"/>
+              <a:t> ls</a:t>
+            </a:r>
+          </a:p>
+          <a:p>
+            <a:pPr lvl="1"/>
+            <a:r>
+              <a:rPr lang="fr-FR" dirty="0" err="1"/>
+              <a:t>mpremote</a:t>
+            </a:r>
+            <a:r>
+              <a:rPr lang="fr-FR" dirty="0"/>
+              <a:t> </a:t>
+            </a:r>
+            <a:r>
+              <a:rPr lang="fr-FR" dirty="0" err="1"/>
               <a:t>cp</a:t>
             </a:r>
             <a:r>
-              <a:rPr lang="fr-FR"/>
+              <a:rPr lang="fr-FR" dirty="0"/>
               <a:t> ./file.csv :/</a:t>
             </a:r>
           </a:p>
           <a:p>
             <a:pPr lvl="1"/>
+            <a:r>
+              <a:rPr lang="fr-FR" dirty="0" err="1"/>
+              <a:t>mpremote</a:t>
+            </a:r>
+            <a:r>
+              <a:rPr lang="fr-FR" dirty="0"/>
+              <a:t> </a:t>
+            </a:r>
             <a:r>
               <a:rPr lang="fr-FR" dirty="0" err="1"/>
               <a:t>cp</a:t>
@@ -4754,15 +4816,7 @@
             </a:r>
             <a:r>
               <a:rPr lang="fr-FR" dirty="0"/>
-              <a:t> est </a:t>
-            </a:r>
-            <a:r>
-              <a:rPr lang="fr-FR" dirty="0" err="1"/>
-              <a:t>est</a:t>
-            </a:r>
-            <a:r>
-              <a:rPr lang="fr-FR" dirty="0"/>
-              <a:t> pour les ESP32 </a:t>
+              <a:t> est pour les ESP32 </a:t>
             </a:r>
             <a:r>
               <a:rPr lang="fr-FR" dirty="0" err="1"/>
@@ -4795,10 +4849,9 @@
           <a:p>
             <a:pPr lvl="1"/>
             <a:r>
-              <a:rPr lang="fr-FR"/>
-              <a:t>mpy_cam-v1.27.0-ESP32_GENERIC-SPIRAM</a:t>
-            </a:r>
-            <a:endParaRPr lang="fr-FR" dirty="0"/>
+              <a:rPr lang="fr-FR" dirty="0"/>
+              <a:t>mpy_cam-v1.27.0-ESP32_GENERIC-SPIRAM.bin</a:t>
+            </a:r>
           </a:p>
         </p:txBody>
       </p:sp>
